--- a/ENTREGA FINAL/4. Diagramas de secuencia/Hug Capafons.pptx
+++ b/ENTREGA FINAL/4. Diagramas de secuencia/Hug Capafons.pptx
@@ -129,6 +129,11 @@
       </a:defRPr>
     </a:lvl9pPr>
   </p:defaultTextStyle>
+  <p:extLst>
+    <p:ext uri="{EFAFB233-063F-42B5-8137-9DF3F51BA10A}">
+      <p15:sldGuideLst xmlns:p15="http://schemas.microsoft.com/office/powerpoint/2012/main"/>
+    </p:ext>
+  </p:extLst>
 </p:presentation>
 </file>
 
@@ -10035,29 +10040,6 @@
           </a:p>
         </p:txBody>
       </p:sp>
-      <p:pic>
-        <p:nvPicPr>
-          <p:cNvPr id="98" name="Imagen 4"/>
-          <p:cNvPicPr/>
-          <p:nvPr/>
-        </p:nvPicPr>
-        <p:blipFill>
-          <a:blip r:embed="rId2"/>
-          <a:stretch/>
-        </p:blipFill>
-        <p:spPr>
-          <a:xfrm>
-            <a:off x="3513600" y="2168280"/>
-            <a:ext cx="5164200" cy="4552560"/>
-          </a:xfrm>
-          <a:prstGeom prst="rect">
-            <a:avLst/>
-          </a:prstGeom>
-          <a:ln w="0">
-            <a:noFill/>
-          </a:ln>
-        </p:spPr>
-      </p:pic>
       <p:sp>
         <p:nvSpPr>
           <p:cNvPr id="3" name="PlaceHolder 2"/>
@@ -10081,6 +10063,36 @@
           </a:p>
         </p:txBody>
       </p:sp>
+      <p:pic>
+        <p:nvPicPr>
+          <p:cNvPr id="4" name="Picture 3">
+            <a:extLst>
+              <a:ext uri="{FF2B5EF4-FFF2-40B4-BE49-F238E27FC236}">
+                <a16:creationId xmlns:a16="http://schemas.microsoft.com/office/drawing/2014/main" id="{B74A36AD-41F3-A3F6-9803-9C8BC92945C2}"/>
+              </a:ext>
+            </a:extLst>
+          </p:cNvPr>
+          <p:cNvPicPr>
+            <a:picLocks noChangeAspect="1"/>
+          </p:cNvPicPr>
+          <p:nvPr/>
+        </p:nvPicPr>
+        <p:blipFill>
+          <a:blip r:embed="rId2"/>
+          <a:stretch>
+            <a:fillRect/>
+          </a:stretch>
+        </p:blipFill>
+        <p:spPr>
+          <a:xfrm>
+            <a:off x="3587412" y="2033200"/>
+            <a:ext cx="5017176" cy="4824800"/>
+          </a:xfrm>
+          <a:prstGeom prst="rect">
+            <a:avLst/>
+          </a:prstGeom>
+        </p:spPr>
+      </p:pic>
     </p:spTree>
   </p:cSld>
   <p:clrMapOvr>
